--- a/compos_model/compos_model.pptx
+++ b/compos_model/compos_model.pptx
@@ -259,7 +259,7 @@
           <a:p>
             <a:fld id="{2225F40E-4D6A-4DF5-98D1-C5D2D280A6AC}" type="datetimeFigureOut">
               <a:rPr lang="en-US" smtClean="0"/>
-              <a:t>6/24/2025</a:t>
+              <a:t>8/23/2025</a:t>
             </a:fld>
             <a:endParaRPr lang="en-US"/>
           </a:p>
@@ -457,7 +457,7 @@
           <a:p>
             <a:fld id="{2225F40E-4D6A-4DF5-98D1-C5D2D280A6AC}" type="datetimeFigureOut">
               <a:rPr lang="en-US" smtClean="0"/>
-              <a:t>6/24/2025</a:t>
+              <a:t>8/23/2025</a:t>
             </a:fld>
             <a:endParaRPr lang="en-US"/>
           </a:p>
@@ -665,7 +665,7 @@
           <a:p>
             <a:fld id="{2225F40E-4D6A-4DF5-98D1-C5D2D280A6AC}" type="datetimeFigureOut">
               <a:rPr lang="en-US" smtClean="0"/>
-              <a:t>6/24/2025</a:t>
+              <a:t>8/23/2025</a:t>
             </a:fld>
             <a:endParaRPr lang="en-US"/>
           </a:p>
@@ -863,7 +863,7 @@
           <a:p>
             <a:fld id="{2225F40E-4D6A-4DF5-98D1-C5D2D280A6AC}" type="datetimeFigureOut">
               <a:rPr lang="en-US" smtClean="0"/>
-              <a:t>6/24/2025</a:t>
+              <a:t>8/23/2025</a:t>
             </a:fld>
             <a:endParaRPr lang="en-US"/>
           </a:p>
@@ -1138,7 +1138,7 @@
           <a:p>
             <a:fld id="{2225F40E-4D6A-4DF5-98D1-C5D2D280A6AC}" type="datetimeFigureOut">
               <a:rPr lang="en-US" smtClean="0"/>
-              <a:t>6/24/2025</a:t>
+              <a:t>8/23/2025</a:t>
             </a:fld>
             <a:endParaRPr lang="en-US"/>
           </a:p>
@@ -1403,7 +1403,7 @@
           <a:p>
             <a:fld id="{2225F40E-4D6A-4DF5-98D1-C5D2D280A6AC}" type="datetimeFigureOut">
               <a:rPr lang="en-US" smtClean="0"/>
-              <a:t>6/24/2025</a:t>
+              <a:t>8/23/2025</a:t>
             </a:fld>
             <a:endParaRPr lang="en-US"/>
           </a:p>
@@ -1815,7 +1815,7 @@
           <a:p>
             <a:fld id="{2225F40E-4D6A-4DF5-98D1-C5D2D280A6AC}" type="datetimeFigureOut">
               <a:rPr lang="en-US" smtClean="0"/>
-              <a:t>6/24/2025</a:t>
+              <a:t>8/23/2025</a:t>
             </a:fld>
             <a:endParaRPr lang="en-US"/>
           </a:p>
@@ -1956,7 +1956,7 @@
           <a:p>
             <a:fld id="{2225F40E-4D6A-4DF5-98D1-C5D2D280A6AC}" type="datetimeFigureOut">
               <a:rPr lang="en-US" smtClean="0"/>
-              <a:t>6/24/2025</a:t>
+              <a:t>8/23/2025</a:t>
             </a:fld>
             <a:endParaRPr lang="en-US"/>
           </a:p>
@@ -2069,7 +2069,7 @@
           <a:p>
             <a:fld id="{2225F40E-4D6A-4DF5-98D1-C5D2D280A6AC}" type="datetimeFigureOut">
               <a:rPr lang="en-US" smtClean="0"/>
-              <a:t>6/24/2025</a:t>
+              <a:t>8/23/2025</a:t>
             </a:fld>
             <a:endParaRPr lang="en-US"/>
           </a:p>
@@ -2380,7 +2380,7 @@
           <a:p>
             <a:fld id="{2225F40E-4D6A-4DF5-98D1-C5D2D280A6AC}" type="datetimeFigureOut">
               <a:rPr lang="en-US" smtClean="0"/>
-              <a:t>6/24/2025</a:t>
+              <a:t>8/23/2025</a:t>
             </a:fld>
             <a:endParaRPr lang="en-US"/>
           </a:p>
@@ -2668,7 +2668,7 @@
           <a:p>
             <a:fld id="{2225F40E-4D6A-4DF5-98D1-C5D2D280A6AC}" type="datetimeFigureOut">
               <a:rPr lang="en-US" smtClean="0"/>
-              <a:t>6/24/2025</a:t>
+              <a:t>8/23/2025</a:t>
             </a:fld>
             <a:endParaRPr lang="en-US"/>
           </a:p>
@@ -2909,7 +2909,7 @@
           <a:p>
             <a:fld id="{2225F40E-4D6A-4DF5-98D1-C5D2D280A6AC}" type="datetimeFigureOut">
               <a:rPr lang="en-US" smtClean="0"/>
-              <a:t>6/24/2025</a:t>
+              <a:t>8/23/2025</a:t>
             </a:fld>
             <a:endParaRPr lang="en-US"/>
           </a:p>
@@ -3331,7 +3331,7 @@
           <p:cNvPr id="3" name="Group 2">
             <a:extLst>
               <a:ext uri="{FF2B5EF4-FFF2-40B4-BE49-F238E27FC236}">
-                <a16:creationId xmlns:a16="http://schemas.microsoft.com/office/drawing/2014/main" id="{0CA83B78-E055-9251-0BA4-63A7BD7359D4}"/>
+                <a16:creationId xmlns:a16="http://schemas.microsoft.com/office/drawing/2014/main" id="{F229E1FA-F5E3-91AA-4D9D-22A2DD11D06F}"/>
               </a:ext>
             </a:extLst>
           </p:cNvPr>
@@ -3340,10 +3340,10 @@
         </p:nvGrpSpPr>
         <p:grpSpPr>
           <a:xfrm>
-            <a:off x="1769034" y="1410447"/>
-            <a:ext cx="7894919" cy="3030071"/>
-            <a:chOff x="1769034" y="1410447"/>
-            <a:chExt cx="7894919" cy="3030071"/>
+            <a:off x="180379" y="942109"/>
+            <a:ext cx="11910021" cy="4599710"/>
+            <a:chOff x="180379" y="942109"/>
+            <a:chExt cx="11910021" cy="4599710"/>
           </a:xfrm>
         </p:grpSpPr>
         <p:sp>
@@ -3360,8 +3360,8 @@
           </p:nvSpPr>
           <p:spPr>
             <a:xfrm>
-              <a:off x="1769034" y="1410447"/>
-              <a:ext cx="7894919" cy="3030071"/>
+              <a:off x="180379" y="942109"/>
+              <a:ext cx="11910021" cy="4599710"/>
             </a:xfrm>
             <a:prstGeom prst="rect">
               <a:avLst/>
@@ -3402,10 +3402,10 @@
         </p:sp>
         <p:pic>
           <p:nvPicPr>
-            <p:cNvPr id="11" name="Picture 10">
+            <p:cNvPr id="4" name="Picture 3">
               <a:extLst>
                 <a:ext uri="{FF2B5EF4-FFF2-40B4-BE49-F238E27FC236}">
-                  <a16:creationId xmlns:a16="http://schemas.microsoft.com/office/drawing/2014/main" id="{4D06D9C1-4887-A2B7-8883-866876A62E78}"/>
+                  <a16:creationId xmlns:a16="http://schemas.microsoft.com/office/drawing/2014/main" id="{13A0F201-4EC3-AC1E-3D4C-F8EE547C97FA}"/>
                 </a:ext>
               </a:extLst>
             </p:cNvPr>
@@ -3428,8 +3428,8 @@
           </p:blipFill>
           <p:spPr>
             <a:xfrm>
-              <a:off x="5789149" y="1847186"/>
-              <a:ext cx="3790572" cy="2527048"/>
+              <a:off x="6183767" y="1546615"/>
+              <a:ext cx="5823794" cy="3882529"/>
             </a:xfrm>
             <a:prstGeom prst="rect">
               <a:avLst/>
@@ -3438,10 +3438,10 @@
         </p:pic>
         <p:pic>
           <p:nvPicPr>
-            <p:cNvPr id="13" name="Picture 12">
+            <p:cNvPr id="11" name="Picture 10">
               <a:extLst>
                 <a:ext uri="{FF2B5EF4-FFF2-40B4-BE49-F238E27FC236}">
-                  <a16:creationId xmlns:a16="http://schemas.microsoft.com/office/drawing/2014/main" id="{37E9449B-A643-7D69-4003-28A676D07F54}"/>
+                  <a16:creationId xmlns:a16="http://schemas.microsoft.com/office/drawing/2014/main" id="{0EEDFDE4-7202-DF81-BA8E-759FE11FBBFD}"/>
                 </a:ext>
               </a:extLst>
             </p:cNvPr>
@@ -3464,8 +3464,8 @@
           </p:blipFill>
           <p:spPr>
             <a:xfrm>
-              <a:off x="1893824" y="1847187"/>
-              <a:ext cx="3790572" cy="2527048"/>
+              <a:off x="270176" y="1546615"/>
+              <a:ext cx="5823794" cy="3882529"/>
             </a:xfrm>
             <a:prstGeom prst="rect">
               <a:avLst/>
@@ -3486,8 +3486,8 @@
           </p:nvSpPr>
           <p:spPr>
             <a:xfrm>
-              <a:off x="2041110" y="1503461"/>
-              <a:ext cx="442172" cy="369332"/>
+              <a:off x="847521" y="1064442"/>
+              <a:ext cx="847093" cy="646331"/>
             </a:xfrm>
             <a:prstGeom prst="rect">
               <a:avLst/>
@@ -3495,13 +3495,13 @@
             <a:noFill/>
           </p:spPr>
           <p:txBody>
-            <a:bodyPr wrap="none" rtlCol="0">
+            <a:bodyPr wrap="square" rtlCol="0">
               <a:spAutoFit/>
             </a:bodyPr>
             <a:lstStyle/>
             <a:p>
               <a:r>
-                <a:rPr lang="en-US" dirty="0"/>
+                <a:rPr lang="en-US" sz="3600" dirty="0"/>
                 <a:t>(a)</a:t>
               </a:r>
             </a:p>
@@ -3521,8 +3521,8 @@
           </p:nvSpPr>
           <p:spPr>
             <a:xfrm>
-              <a:off x="6222610" y="1503461"/>
-              <a:ext cx="449162" cy="369332"/>
+              <a:off x="6931712" y="1064443"/>
+              <a:ext cx="860484" cy="646331"/>
             </a:xfrm>
             <a:prstGeom prst="rect">
               <a:avLst/>
@@ -3530,13 +3530,13 @@
             <a:noFill/>
           </p:spPr>
           <p:txBody>
-            <a:bodyPr wrap="none" rtlCol="0">
+            <a:bodyPr wrap="square" rtlCol="0">
               <a:spAutoFit/>
             </a:bodyPr>
             <a:lstStyle/>
             <a:p>
               <a:r>
-                <a:rPr lang="en-US" dirty="0"/>
+                <a:rPr lang="en-US" sz="3600" dirty="0"/>
                 <a:t>(b)</a:t>
               </a:r>
             </a:p>
